--- a/public/fun/cards/beauty/beauty-30.pptx
+++ b/public/fun/cards/beauty/beauty-30.pptx
@@ -3085,7 +3085,7 @@
     <p:bg>
       <p:bgPr>
         <a:solidFill>
-          <a:srgbClr val="FBF8F2"/>
+          <a:srgbClr val="FFF1F4"/>
         </a:solidFill>
         <a:effectLst/>
       </p:bgPr>
@@ -3099,692 +3099,14 @@
       <p:grpSpPr/>
       <p:sp>
         <p:nvSpPr>
-          <p:cNvPr id="2" name="Oval 1"/>
-          <p:cNvSpPr/>
+          <p:cNvPr id="2" name="텍스트"/>
+          <p:cNvSpPr txBox="1"/>
           <p:nvPr/>
         </p:nvSpPr>
         <p:spPr>
           <a:xfrm>
-            <a:off x="2462400" y="158400"/>
-            <a:ext cx="43200" cy="43200"/>
-          </a:xfrm>
-          <a:prstGeom prst="ellipse">
-            <a:avLst/>
-          </a:prstGeom>
-          <a:solidFill>
-            <a:srgbClr val="3B8B91">
-              <a:alpha val="70000"/>
-            </a:srgbClr>
-          </a:solidFill>
-          <a:ln>
-            <a:noFill/>
-          </a:ln>
-        </p:spPr>
-        <p:txBody>
-          <a:bodyPr rtlCol="0" anchor="ctr"/>
-          <a:lstStyle/>
-          <a:p>
-            <a:pPr algn="ctr"/>
-          </a:p>
-        </p:txBody>
-      </p:sp>
-      <p:sp>
-        <p:nvSpPr>
-          <p:cNvPr id="3" name="Oval 2"/>
-          <p:cNvSpPr/>
-          <p:nvPr/>
-        </p:nvSpPr>
-        <p:spPr>
-          <a:xfrm>
-            <a:off x="2462400" y="266400"/>
-            <a:ext cx="43200" cy="43200"/>
-          </a:xfrm>
-          <a:prstGeom prst="ellipse">
-            <a:avLst/>
-          </a:prstGeom>
-          <a:solidFill>
-            <a:srgbClr val="3B8B91">
-              <a:alpha val="57999"/>
-            </a:srgbClr>
-          </a:solidFill>
-          <a:ln>
-            <a:noFill/>
-          </a:ln>
-        </p:spPr>
-        <p:txBody>
-          <a:bodyPr rtlCol="0" anchor="ctr"/>
-          <a:lstStyle/>
-          <a:p>
-            <a:pPr algn="ctr"/>
-          </a:p>
-        </p:txBody>
-      </p:sp>
-      <p:sp>
-        <p:nvSpPr>
-          <p:cNvPr id="4" name="Oval 3"/>
-          <p:cNvSpPr/>
-          <p:nvPr/>
-        </p:nvSpPr>
-        <p:spPr>
-          <a:xfrm>
-            <a:off x="2462400" y="374400"/>
-            <a:ext cx="43200" cy="43200"/>
-          </a:xfrm>
-          <a:prstGeom prst="ellipse">
-            <a:avLst/>
-          </a:prstGeom>
-          <a:solidFill>
-            <a:srgbClr val="3B8B91">
-              <a:alpha val="46000"/>
-            </a:srgbClr>
-          </a:solidFill>
-          <a:ln>
-            <a:noFill/>
-          </a:ln>
-        </p:spPr>
-        <p:txBody>
-          <a:bodyPr rtlCol="0" anchor="ctr"/>
-          <a:lstStyle/>
-          <a:p>
-            <a:pPr algn="ctr"/>
-          </a:p>
-        </p:txBody>
-      </p:sp>
-      <p:sp>
-        <p:nvSpPr>
-          <p:cNvPr id="5" name="Oval 4"/>
-          <p:cNvSpPr/>
-          <p:nvPr/>
-        </p:nvSpPr>
-        <p:spPr>
-          <a:xfrm>
-            <a:off x="2462400" y="482400"/>
-            <a:ext cx="43200" cy="43200"/>
-          </a:xfrm>
-          <a:prstGeom prst="ellipse">
-            <a:avLst/>
-          </a:prstGeom>
-          <a:solidFill>
-            <a:srgbClr val="3B8B91">
-              <a:alpha val="34000"/>
-            </a:srgbClr>
-          </a:solidFill>
-          <a:ln>
-            <a:noFill/>
-          </a:ln>
-        </p:spPr>
-        <p:txBody>
-          <a:bodyPr rtlCol="0" anchor="ctr"/>
-          <a:lstStyle/>
-          <a:p>
-            <a:pPr algn="ctr"/>
-          </a:p>
-        </p:txBody>
-      </p:sp>
-      <p:sp>
-        <p:nvSpPr>
-          <p:cNvPr id="6" name="Oval 5"/>
-          <p:cNvSpPr/>
-          <p:nvPr/>
-        </p:nvSpPr>
-        <p:spPr>
-          <a:xfrm>
-            <a:off x="2570400" y="158400"/>
-            <a:ext cx="43200" cy="43200"/>
-          </a:xfrm>
-          <a:prstGeom prst="ellipse">
-            <a:avLst/>
-          </a:prstGeom>
-          <a:solidFill>
-            <a:srgbClr val="3B8B91">
-              <a:alpha val="70000"/>
-            </a:srgbClr>
-          </a:solidFill>
-          <a:ln>
-            <a:noFill/>
-          </a:ln>
-        </p:spPr>
-        <p:txBody>
-          <a:bodyPr rtlCol="0" anchor="ctr"/>
-          <a:lstStyle/>
-          <a:p>
-            <a:pPr algn="ctr"/>
-          </a:p>
-        </p:txBody>
-      </p:sp>
-      <p:sp>
-        <p:nvSpPr>
-          <p:cNvPr id="7" name="Oval 6"/>
-          <p:cNvSpPr/>
-          <p:nvPr/>
-        </p:nvSpPr>
-        <p:spPr>
-          <a:xfrm>
-            <a:off x="2570400" y="266400"/>
-            <a:ext cx="43200" cy="43200"/>
-          </a:xfrm>
-          <a:prstGeom prst="ellipse">
-            <a:avLst/>
-          </a:prstGeom>
-          <a:solidFill>
-            <a:srgbClr val="3B8B91">
-              <a:alpha val="57999"/>
-            </a:srgbClr>
-          </a:solidFill>
-          <a:ln>
-            <a:noFill/>
-          </a:ln>
-        </p:spPr>
-        <p:txBody>
-          <a:bodyPr rtlCol="0" anchor="ctr"/>
-          <a:lstStyle/>
-          <a:p>
-            <a:pPr algn="ctr"/>
-          </a:p>
-        </p:txBody>
-      </p:sp>
-      <p:sp>
-        <p:nvSpPr>
-          <p:cNvPr id="8" name="Oval 7"/>
-          <p:cNvSpPr/>
-          <p:nvPr/>
-        </p:nvSpPr>
-        <p:spPr>
-          <a:xfrm>
-            <a:off x="2570400" y="374400"/>
-            <a:ext cx="43200" cy="43200"/>
-          </a:xfrm>
-          <a:prstGeom prst="ellipse">
-            <a:avLst/>
-          </a:prstGeom>
-          <a:solidFill>
-            <a:srgbClr val="3B8B91">
-              <a:alpha val="46000"/>
-            </a:srgbClr>
-          </a:solidFill>
-          <a:ln>
-            <a:noFill/>
-          </a:ln>
-        </p:spPr>
-        <p:txBody>
-          <a:bodyPr rtlCol="0" anchor="ctr"/>
-          <a:lstStyle/>
-          <a:p>
-            <a:pPr algn="ctr"/>
-          </a:p>
-        </p:txBody>
-      </p:sp>
-      <p:sp>
-        <p:nvSpPr>
-          <p:cNvPr id="9" name="Oval 8"/>
-          <p:cNvSpPr/>
-          <p:nvPr/>
-        </p:nvSpPr>
-        <p:spPr>
-          <a:xfrm>
-            <a:off x="2570400" y="482400"/>
-            <a:ext cx="43200" cy="43200"/>
-          </a:xfrm>
-          <a:prstGeom prst="ellipse">
-            <a:avLst/>
-          </a:prstGeom>
-          <a:solidFill>
-            <a:srgbClr val="3B8B91">
-              <a:alpha val="34000"/>
-            </a:srgbClr>
-          </a:solidFill>
-          <a:ln>
-            <a:noFill/>
-          </a:ln>
-        </p:spPr>
-        <p:txBody>
-          <a:bodyPr rtlCol="0" anchor="ctr"/>
-          <a:lstStyle/>
-          <a:p>
-            <a:pPr algn="ctr"/>
-          </a:p>
-        </p:txBody>
-      </p:sp>
-      <p:sp>
-        <p:nvSpPr>
-          <p:cNvPr id="10" name="Oval 9"/>
-          <p:cNvSpPr/>
-          <p:nvPr/>
-        </p:nvSpPr>
-        <p:spPr>
-          <a:xfrm>
-            <a:off x="2678400" y="158400"/>
-            <a:ext cx="43200" cy="43200"/>
-          </a:xfrm>
-          <a:prstGeom prst="ellipse">
-            <a:avLst/>
-          </a:prstGeom>
-          <a:solidFill>
-            <a:srgbClr val="3B8B91">
-              <a:alpha val="70000"/>
-            </a:srgbClr>
-          </a:solidFill>
-          <a:ln>
-            <a:noFill/>
-          </a:ln>
-        </p:spPr>
-        <p:txBody>
-          <a:bodyPr rtlCol="0" anchor="ctr"/>
-          <a:lstStyle/>
-          <a:p>
-            <a:pPr algn="ctr"/>
-          </a:p>
-        </p:txBody>
-      </p:sp>
-      <p:sp>
-        <p:nvSpPr>
-          <p:cNvPr id="11" name="Oval 10"/>
-          <p:cNvSpPr/>
-          <p:nvPr/>
-        </p:nvSpPr>
-        <p:spPr>
-          <a:xfrm>
-            <a:off x="2678400" y="266400"/>
-            <a:ext cx="43200" cy="43200"/>
-          </a:xfrm>
-          <a:prstGeom prst="ellipse">
-            <a:avLst/>
-          </a:prstGeom>
-          <a:solidFill>
-            <a:srgbClr val="3B8B91">
-              <a:alpha val="57999"/>
-            </a:srgbClr>
-          </a:solidFill>
-          <a:ln>
-            <a:noFill/>
-          </a:ln>
-        </p:spPr>
-        <p:txBody>
-          <a:bodyPr rtlCol="0" anchor="ctr"/>
-          <a:lstStyle/>
-          <a:p>
-            <a:pPr algn="ctr"/>
-          </a:p>
-        </p:txBody>
-      </p:sp>
-      <p:sp>
-        <p:nvSpPr>
-          <p:cNvPr id="12" name="Oval 11"/>
-          <p:cNvSpPr/>
-          <p:nvPr/>
-        </p:nvSpPr>
-        <p:spPr>
-          <a:xfrm>
-            <a:off x="2678400" y="374400"/>
-            <a:ext cx="43200" cy="43200"/>
-          </a:xfrm>
-          <a:prstGeom prst="ellipse">
-            <a:avLst/>
-          </a:prstGeom>
-          <a:solidFill>
-            <a:srgbClr val="3B8B91">
-              <a:alpha val="46000"/>
-            </a:srgbClr>
-          </a:solidFill>
-          <a:ln>
-            <a:noFill/>
-          </a:ln>
-        </p:spPr>
-        <p:txBody>
-          <a:bodyPr rtlCol="0" anchor="ctr"/>
-          <a:lstStyle/>
-          <a:p>
-            <a:pPr algn="ctr"/>
-          </a:p>
-        </p:txBody>
-      </p:sp>
-      <p:sp>
-        <p:nvSpPr>
-          <p:cNvPr id="13" name="Oval 12"/>
-          <p:cNvSpPr/>
-          <p:nvPr/>
-        </p:nvSpPr>
-        <p:spPr>
-          <a:xfrm>
-            <a:off x="2678400" y="482400"/>
-            <a:ext cx="43200" cy="43200"/>
-          </a:xfrm>
-          <a:prstGeom prst="ellipse">
-            <a:avLst/>
-          </a:prstGeom>
-          <a:solidFill>
-            <a:srgbClr val="3B8B91">
-              <a:alpha val="34000"/>
-            </a:srgbClr>
-          </a:solidFill>
-          <a:ln>
-            <a:noFill/>
-          </a:ln>
-        </p:spPr>
-        <p:txBody>
-          <a:bodyPr rtlCol="0" anchor="ctr"/>
-          <a:lstStyle/>
-          <a:p>
-            <a:pPr algn="ctr"/>
-          </a:p>
-        </p:txBody>
-      </p:sp>
-      <p:sp>
-        <p:nvSpPr>
-          <p:cNvPr id="14" name="Oval 13"/>
-          <p:cNvSpPr/>
-          <p:nvPr/>
-        </p:nvSpPr>
-        <p:spPr>
-          <a:xfrm>
-            <a:off x="2786400" y="158400"/>
-            <a:ext cx="43200" cy="43200"/>
-          </a:xfrm>
-          <a:prstGeom prst="ellipse">
-            <a:avLst/>
-          </a:prstGeom>
-          <a:solidFill>
-            <a:srgbClr val="3B8B91">
-              <a:alpha val="70000"/>
-            </a:srgbClr>
-          </a:solidFill>
-          <a:ln>
-            <a:noFill/>
-          </a:ln>
-        </p:spPr>
-        <p:txBody>
-          <a:bodyPr rtlCol="0" anchor="ctr"/>
-          <a:lstStyle/>
-          <a:p>
-            <a:pPr algn="ctr"/>
-          </a:p>
-        </p:txBody>
-      </p:sp>
-      <p:sp>
-        <p:nvSpPr>
-          <p:cNvPr id="15" name="Oval 14"/>
-          <p:cNvSpPr/>
-          <p:nvPr/>
-        </p:nvSpPr>
-        <p:spPr>
-          <a:xfrm>
-            <a:off x="2786400" y="266400"/>
-            <a:ext cx="43200" cy="43200"/>
-          </a:xfrm>
-          <a:prstGeom prst="ellipse">
-            <a:avLst/>
-          </a:prstGeom>
-          <a:solidFill>
-            <a:srgbClr val="3B8B91">
-              <a:alpha val="57999"/>
-            </a:srgbClr>
-          </a:solidFill>
-          <a:ln>
-            <a:noFill/>
-          </a:ln>
-        </p:spPr>
-        <p:txBody>
-          <a:bodyPr rtlCol="0" anchor="ctr"/>
-          <a:lstStyle/>
-          <a:p>
-            <a:pPr algn="ctr"/>
-          </a:p>
-        </p:txBody>
-      </p:sp>
-      <p:sp>
-        <p:nvSpPr>
-          <p:cNvPr id="16" name="Oval 15"/>
-          <p:cNvSpPr/>
-          <p:nvPr/>
-        </p:nvSpPr>
-        <p:spPr>
-          <a:xfrm>
-            <a:off x="2786400" y="374400"/>
-            <a:ext cx="43200" cy="43200"/>
-          </a:xfrm>
-          <a:prstGeom prst="ellipse">
-            <a:avLst/>
-          </a:prstGeom>
-          <a:solidFill>
-            <a:srgbClr val="3B8B91">
-              <a:alpha val="46000"/>
-            </a:srgbClr>
-          </a:solidFill>
-          <a:ln>
-            <a:noFill/>
-          </a:ln>
-        </p:spPr>
-        <p:txBody>
-          <a:bodyPr rtlCol="0" anchor="ctr"/>
-          <a:lstStyle/>
-          <a:p>
-            <a:pPr algn="ctr"/>
-          </a:p>
-        </p:txBody>
-      </p:sp>
-      <p:sp>
-        <p:nvSpPr>
-          <p:cNvPr id="17" name="Oval 16"/>
-          <p:cNvSpPr/>
-          <p:nvPr/>
-        </p:nvSpPr>
-        <p:spPr>
-          <a:xfrm>
-            <a:off x="2786400" y="482400"/>
-            <a:ext cx="43200" cy="43200"/>
-          </a:xfrm>
-          <a:prstGeom prst="ellipse">
-            <a:avLst/>
-          </a:prstGeom>
-          <a:solidFill>
-            <a:srgbClr val="3B8B91">
-              <a:alpha val="34000"/>
-            </a:srgbClr>
-          </a:solidFill>
-          <a:ln>
-            <a:noFill/>
-          </a:ln>
-        </p:spPr>
-        <p:txBody>
-          <a:bodyPr rtlCol="0" anchor="ctr"/>
-          <a:lstStyle/>
-          <a:p>
-            <a:pPr algn="ctr"/>
-          </a:p>
-        </p:txBody>
-      </p:sp>
-      <p:sp>
-        <p:nvSpPr>
-          <p:cNvPr id="18" name="Oval 17"/>
-          <p:cNvSpPr/>
-          <p:nvPr/>
-        </p:nvSpPr>
-        <p:spPr>
-          <a:xfrm>
-            <a:off x="2894400" y="158400"/>
-            <a:ext cx="43200" cy="43200"/>
-          </a:xfrm>
-          <a:prstGeom prst="ellipse">
-            <a:avLst/>
-          </a:prstGeom>
-          <a:solidFill>
-            <a:srgbClr val="3B8B91">
-              <a:alpha val="70000"/>
-            </a:srgbClr>
-          </a:solidFill>
-          <a:ln>
-            <a:noFill/>
-          </a:ln>
-        </p:spPr>
-        <p:txBody>
-          <a:bodyPr rtlCol="0" anchor="ctr"/>
-          <a:lstStyle/>
-          <a:p>
-            <a:pPr algn="ctr"/>
-          </a:p>
-        </p:txBody>
-      </p:sp>
-      <p:sp>
-        <p:nvSpPr>
-          <p:cNvPr id="19" name="Oval 18"/>
-          <p:cNvSpPr/>
-          <p:nvPr/>
-        </p:nvSpPr>
-        <p:spPr>
-          <a:xfrm>
-            <a:off x="2894400" y="266400"/>
-            <a:ext cx="43200" cy="43200"/>
-          </a:xfrm>
-          <a:prstGeom prst="ellipse">
-            <a:avLst/>
-          </a:prstGeom>
-          <a:solidFill>
-            <a:srgbClr val="3B8B91">
-              <a:alpha val="57999"/>
-            </a:srgbClr>
-          </a:solidFill>
-          <a:ln>
-            <a:noFill/>
-          </a:ln>
-        </p:spPr>
-        <p:txBody>
-          <a:bodyPr rtlCol="0" anchor="ctr"/>
-          <a:lstStyle/>
-          <a:p>
-            <a:pPr algn="ctr"/>
-          </a:p>
-        </p:txBody>
-      </p:sp>
-      <p:sp>
-        <p:nvSpPr>
-          <p:cNvPr id="20" name="Oval 19"/>
-          <p:cNvSpPr/>
-          <p:nvPr/>
-        </p:nvSpPr>
-        <p:spPr>
-          <a:xfrm>
-            <a:off x="2894400" y="374400"/>
-            <a:ext cx="43200" cy="43200"/>
-          </a:xfrm>
-          <a:prstGeom prst="ellipse">
-            <a:avLst/>
-          </a:prstGeom>
-          <a:solidFill>
-            <a:srgbClr val="3B8B91">
-              <a:alpha val="46000"/>
-            </a:srgbClr>
-          </a:solidFill>
-          <a:ln>
-            <a:noFill/>
-          </a:ln>
-        </p:spPr>
-        <p:txBody>
-          <a:bodyPr rtlCol="0" anchor="ctr"/>
-          <a:lstStyle/>
-          <a:p>
-            <a:pPr algn="ctr"/>
-          </a:p>
-        </p:txBody>
-      </p:sp>
-      <p:sp>
-        <p:nvSpPr>
-          <p:cNvPr id="21" name="Oval 20"/>
-          <p:cNvSpPr/>
-          <p:nvPr/>
-        </p:nvSpPr>
-        <p:spPr>
-          <a:xfrm>
-            <a:off x="2894400" y="482400"/>
-            <a:ext cx="43200" cy="43200"/>
-          </a:xfrm>
-          <a:prstGeom prst="ellipse">
-            <a:avLst/>
-          </a:prstGeom>
-          <a:solidFill>
-            <a:srgbClr val="3B8B91">
-              <a:alpha val="34000"/>
-            </a:srgbClr>
-          </a:solidFill>
-          <a:ln>
-            <a:noFill/>
-          </a:ln>
-        </p:spPr>
-        <p:txBody>
-          <a:bodyPr rtlCol="0" anchor="ctr"/>
-          <a:lstStyle/>
-          <a:p>
-            <a:pPr algn="ctr"/>
-          </a:p>
-        </p:txBody>
-      </p:sp>
-      <p:sp>
-        <p:nvSpPr>
-          <p:cNvPr id="22" name="Rectangle 21"/>
-          <p:cNvSpPr/>
-          <p:nvPr/>
-        </p:nvSpPr>
-        <p:spPr>
-          <a:xfrm>
-            <a:off x="0" y="1663200"/>
-            <a:ext cx="3240000" cy="136800"/>
-          </a:xfrm>
-          <a:prstGeom prst="rect">
-            <a:avLst/>
-          </a:prstGeom>
-          <a:solidFill>
-            <a:srgbClr val="3B8B91"/>
-          </a:solidFill>
-          <a:ln>
-            <a:noFill/>
-          </a:ln>
-        </p:spPr>
-        <p:txBody>
-          <a:bodyPr rtlCol="0" anchor="ctr"/>
-          <a:lstStyle/>
-          <a:p>
-            <a:pPr algn="ctr"/>
-          </a:p>
-        </p:txBody>
-      </p:sp>
-      <p:sp>
-        <p:nvSpPr>
-          <p:cNvPr id="23" name="Rectangle 22"/>
-          <p:cNvSpPr/>
-          <p:nvPr/>
-        </p:nvSpPr>
-        <p:spPr>
-          <a:xfrm>
-            <a:off x="0" y="1663200"/>
-            <a:ext cx="936000" cy="136800"/>
-          </a:xfrm>
-          <a:prstGeom prst="rect">
-            <a:avLst/>
-          </a:prstGeom>
-          <a:solidFill>
-            <a:srgbClr val="C8DFE0"/>
-          </a:solidFill>
-          <a:ln>
-            <a:noFill/>
-          </a:ln>
-        </p:spPr>
-        <p:txBody>
-          <a:bodyPr rtlCol="0" anchor="ctr"/>
-          <a:lstStyle/>
-          <a:p>
-            <a:pPr algn="ctr"/>
-          </a:p>
-        </p:txBody>
-      </p:sp>
-      <p:sp>
-        <p:nvSpPr>
-          <p:cNvPr id="24" name="텍스트"/>
-          <p:cNvSpPr txBox="1"/>
-          <p:nvPr/>
-        </p:nvSpPr>
-        <p:spPr>
-          <a:xfrm>
-            <a:off x="252000" y="208800"/>
-            <a:ext cx="1800000" cy="100800"/>
+            <a:off x="252000" y="223200"/>
+            <a:ext cx="2016000" cy="133351"/>
           </a:xfrm>
           <a:prstGeom prst="rect">
             <a:avLst/>
@@ -3799,13 +3121,13 @@
           <a:p>
             <a:pPr algn="l">
               <a:lnSpc>
-                <a:spcPts val="1087"/>
+                <a:spcPts val="1015"/>
               </a:lnSpc>
             </a:pPr>
             <a:r>
-              <a:rPr sz="750" b="1" spc="150">
+              <a:rPr sz="700" b="1" spc="200">
                 <a:solidFill>
-                  <a:srgbClr val="7D6B53"/>
+                  <a:srgbClr val="6C3747"/>
                 </a:solidFill>
                 <a:latin typeface="맑은 고딕"/>
                 <a:ea typeface="맑은 고딕"/>
@@ -3817,14 +3139,14 @@
       </p:sp>
       <p:sp>
         <p:nvSpPr>
-          <p:cNvPr id="25" name="텍스트"/>
+          <p:cNvPr id="3" name="텍스트"/>
           <p:cNvSpPr txBox="1"/>
           <p:nvPr/>
         </p:nvSpPr>
         <p:spPr>
           <a:xfrm>
-            <a:off x="252000" y="540000"/>
-            <a:ext cx="2016000" cy="313692"/>
+            <a:off x="252000" y="468000"/>
+            <a:ext cx="2520000" cy="360000"/>
           </a:xfrm>
           <a:prstGeom prst="rect">
             <a:avLst/>
@@ -3839,13 +3161,13 @@
           <a:p>
             <a:pPr algn="l">
               <a:lnSpc>
-                <a:spcPts val="2755"/>
+                <a:spcPts val="3190"/>
               </a:lnSpc>
             </a:pPr>
             <a:r>
-              <a:rPr sz="1900" b="1" spc="50">
+              <a:rPr sz="2200" b="1">
                 <a:solidFill>
-                  <a:srgbClr val="5B3D15"/>
+                  <a:srgbClr val="12151C"/>
                 </a:solidFill>
                 <a:latin typeface="맑은 고딕"/>
                 <a:ea typeface="맑은 고딕"/>
@@ -3857,14 +3179,14 @@
       </p:sp>
       <p:sp>
         <p:nvSpPr>
-          <p:cNvPr id="26" name="텍스트"/>
+          <p:cNvPr id="4" name="텍스트"/>
           <p:cNvSpPr txBox="1"/>
           <p:nvPr/>
         </p:nvSpPr>
         <p:spPr>
           <a:xfrm>
-            <a:off x="252000" y="828000"/>
-            <a:ext cx="2016000" cy="122400"/>
+            <a:off x="252000" y="871200"/>
+            <a:ext cx="2520000" cy="171451"/>
           </a:xfrm>
           <a:prstGeom prst="rect">
             <a:avLst/>
@@ -3879,13 +3201,13 @@
           <a:p>
             <a:pPr algn="l">
               <a:lnSpc>
-                <a:spcPts val="1232"/>
+                <a:spcPts val="1305"/>
               </a:lnSpc>
             </a:pPr>
             <a:r>
-              <a:rPr sz="850" b="1">
+              <a:rPr sz="900" b="0">
                 <a:solidFill>
-                  <a:srgbClr val="32767B"/>
+                  <a:srgbClr val="6C3747"/>
                 </a:solidFill>
                 <a:latin typeface="맑은 고딕"/>
                 <a:ea typeface="맑은 고딕"/>
@@ -3897,14 +3219,14 @@
       </p:sp>
       <p:sp>
         <p:nvSpPr>
-          <p:cNvPr id="27" name="텍스트"/>
+          <p:cNvPr id="5" name="텍스트"/>
           <p:cNvSpPr txBox="1"/>
           <p:nvPr/>
         </p:nvSpPr>
         <p:spPr>
           <a:xfrm>
-            <a:off x="252000" y="1108800"/>
-            <a:ext cx="122400" cy="168911"/>
+            <a:off x="252000" y="1216800"/>
+            <a:ext cx="2520000" cy="129541"/>
           </a:xfrm>
           <a:prstGeom prst="rect">
             <a:avLst/>
@@ -3919,32 +3241,61 @@
           <a:p>
             <a:pPr algn="l">
               <a:lnSpc>
-                <a:spcPts val="1015"/>
+                <a:spcPts val="986"/>
               </a:lnSpc>
             </a:pPr>
             <a:r>
-              <a:rPr sz="700" b="1">
+              <a:rPr sz="680" b="0">
                 <a:solidFill>
-                  <a:srgbClr val="32767B"/>
+                  <a:srgbClr val="6C3747"/>
                 </a:solidFill>
                 <a:latin typeface="맑은 고딕"/>
                 <a:ea typeface="맑은 고딕"/>
               </a:rPr>
-              <a:t>T</a:t>
-            </a:r>
-          </a:p>
-        </p:txBody>
-      </p:sp>
-      <p:sp>
-        <p:nvSpPr>
-          <p:cNvPr id="28" name="텍스트"/>
+              <a:t>주소를 입력해 주세요</a:t>
+            </a:r>
+          </a:p>
+        </p:txBody>
+      </p:sp>
+      <p:sp>
+        <p:nvSpPr>
+          <p:cNvPr id="6" name="Rectangle 5"/>
+          <p:cNvSpPr/>
+          <p:nvPr/>
+        </p:nvSpPr>
+        <p:spPr>
+          <a:xfrm>
+            <a:off x="0" y="1476000"/>
+            <a:ext cx="3240000" cy="324000"/>
+          </a:xfrm>
+          <a:prstGeom prst="rect">
+            <a:avLst/>
+          </a:prstGeom>
+          <a:solidFill>
+            <a:srgbClr val="FF6F8E"/>
+          </a:solidFill>
+          <a:ln>
+            <a:noFill/>
+          </a:ln>
+        </p:spPr>
+        <p:txBody>
+          <a:bodyPr rtlCol="0" anchor="ctr"/>
+          <a:lstStyle/>
+          <a:p>
+            <a:pPr algn="ctr"/>
+          </a:p>
+        </p:txBody>
+      </p:sp>
+      <p:sp>
+        <p:nvSpPr>
+          <p:cNvPr id="7" name="텍스트"/>
           <p:cNvSpPr txBox="1"/>
           <p:nvPr/>
         </p:nvSpPr>
         <p:spPr>
           <a:xfrm>
-            <a:off x="396000" y="1108800"/>
-            <a:ext cx="1584000" cy="168911"/>
+            <a:off x="252000" y="1569600"/>
+            <a:ext cx="1296000" cy="133351"/>
           </a:xfrm>
           <a:prstGeom prst="rect">
             <a:avLst/>
@@ -3963,9 +3314,9 @@
               </a:lnSpc>
             </a:pPr>
             <a:r>
-              <a:rPr sz="700" b="0">
+              <a:rPr sz="700" b="1">
                 <a:solidFill>
-                  <a:srgbClr val="5B3D15"/>
+                  <a:srgbClr val="12151C"/>
                 </a:solidFill>
                 <a:latin typeface="맑은 고딕"/>
                 <a:ea typeface="맑은 고딕"/>
@@ -3977,14 +3328,14 @@
       </p:sp>
       <p:sp>
         <p:nvSpPr>
-          <p:cNvPr id="29" name="텍스트"/>
+          <p:cNvPr id="8" name="텍스트"/>
           <p:cNvSpPr txBox="1"/>
           <p:nvPr/>
         </p:nvSpPr>
         <p:spPr>
           <a:xfrm>
-            <a:off x="252000" y="1277711"/>
-            <a:ext cx="122400" cy="168911"/>
+            <a:off x="1656000" y="1569600"/>
+            <a:ext cx="1368000" cy="133351"/>
           </a:xfrm>
           <a:prstGeom prst="rect">
             <a:avLst/>
@@ -4005,307 +3356,13 @@
             <a:r>
               <a:rPr sz="700" b="1">
                 <a:solidFill>
-                  <a:srgbClr val="32767B"/>
-                </a:solidFill>
-                <a:latin typeface="맑은 고딕"/>
-                <a:ea typeface="맑은 고딕"/>
-              </a:rPr>
-              <a:t>E</a:t>
-            </a:r>
-          </a:p>
-        </p:txBody>
-      </p:sp>
-      <p:sp>
-        <p:nvSpPr>
-          <p:cNvPr id="30" name="텍스트"/>
-          <p:cNvSpPr txBox="1"/>
-          <p:nvPr/>
-        </p:nvSpPr>
-        <p:spPr>
-          <a:xfrm>
-            <a:off x="396000" y="1277711"/>
-            <a:ext cx="1584000" cy="168911"/>
-          </a:xfrm>
-          <a:prstGeom prst="rect">
-            <a:avLst/>
-          </a:prstGeom>
-          <a:noFill/>
-        </p:spPr>
-        <p:txBody>
-          <a:bodyPr wrap="square" lIns="0" rIns="0" tIns="0" bIns="0" anchor="t">
-            <a:spAutoFit/>
-          </a:bodyPr>
-          <a:lstStyle/>
-          <a:p>
-            <a:pPr algn="l">
-              <a:lnSpc>
-                <a:spcPts val="1015"/>
-              </a:lnSpc>
-            </a:pPr>
-            <a:r>
-              <a:rPr sz="700" b="0">
-                <a:solidFill>
-                  <a:srgbClr val="5B3D15"/>
+                  <a:srgbClr val="12151C"/>
                 </a:solidFill>
                 <a:latin typeface="맑은 고딕"/>
                 <a:ea typeface="맑은 고딕"/>
               </a:rPr>
               <a:t>name@example.com</a:t>
             </a:r>
-          </a:p>
-        </p:txBody>
-      </p:sp>
-      <p:sp>
-        <p:nvSpPr>
-          <p:cNvPr id="31" name="텍스트"/>
-          <p:cNvSpPr txBox="1"/>
-          <p:nvPr/>
-        </p:nvSpPr>
-        <p:spPr>
-          <a:xfrm>
-            <a:off x="252000" y="1446622"/>
-            <a:ext cx="122400" cy="168911"/>
-          </a:xfrm>
-          <a:prstGeom prst="rect">
-            <a:avLst/>
-          </a:prstGeom>
-          <a:noFill/>
-        </p:spPr>
-        <p:txBody>
-          <a:bodyPr wrap="square" lIns="0" rIns="0" tIns="0" bIns="0" anchor="t">
-            <a:spAutoFit/>
-          </a:bodyPr>
-          <a:lstStyle/>
-          <a:p>
-            <a:pPr algn="l">
-              <a:lnSpc>
-                <a:spcPts val="1015"/>
-              </a:lnSpc>
-            </a:pPr>
-            <a:r>
-              <a:rPr sz="700" b="1">
-                <a:solidFill>
-                  <a:srgbClr val="32767B"/>
-                </a:solidFill>
-                <a:latin typeface="맑은 고딕"/>
-                <a:ea typeface="맑은 고딕"/>
-              </a:rPr>
-              <a:t>A</a:t>
-            </a:r>
-          </a:p>
-        </p:txBody>
-      </p:sp>
-      <p:sp>
-        <p:nvSpPr>
-          <p:cNvPr id="32" name="텍스트"/>
-          <p:cNvSpPr txBox="1"/>
-          <p:nvPr/>
-        </p:nvSpPr>
-        <p:spPr>
-          <a:xfrm>
-            <a:off x="396000" y="1446622"/>
-            <a:ext cx="1584000" cy="168911"/>
-          </a:xfrm>
-          <a:prstGeom prst="rect">
-            <a:avLst/>
-          </a:prstGeom>
-          <a:noFill/>
-        </p:spPr>
-        <p:txBody>
-          <a:bodyPr wrap="square" lIns="0" rIns="0" tIns="0" bIns="0" anchor="t">
-            <a:spAutoFit/>
-          </a:bodyPr>
-          <a:lstStyle/>
-          <a:p>
-            <a:pPr algn="l">
-              <a:lnSpc>
-                <a:spcPts val="1015"/>
-              </a:lnSpc>
-            </a:pPr>
-            <a:r>
-              <a:rPr sz="700" b="0">
-                <a:solidFill>
-                  <a:srgbClr val="5B3D15"/>
-                </a:solidFill>
-                <a:latin typeface="맑은 고딕"/>
-                <a:ea typeface="맑은 고딕"/>
-              </a:rPr>
-              <a:t>주소를 입력해 주세요</a:t>
-            </a:r>
-          </a:p>
-        </p:txBody>
-      </p:sp>
-      <p:sp>
-        <p:nvSpPr>
-          <p:cNvPr id="33" name="Oval 32"/>
-          <p:cNvSpPr/>
-          <p:nvPr/>
-        </p:nvSpPr>
-        <p:spPr>
-          <a:xfrm>
-            <a:off x="2842560" y="1055520"/>
-            <a:ext cx="74880" cy="126720"/>
-          </a:xfrm>
-          <a:prstGeom prst="ellipse">
-            <a:avLst/>
-          </a:prstGeom>
-          <a:solidFill>
-            <a:srgbClr val="3B8B91"/>
-          </a:solidFill>
-          <a:ln>
-            <a:noFill/>
-          </a:ln>
-        </p:spPr>
-        <p:txBody>
-          <a:bodyPr rtlCol="0" anchor="ctr"/>
-          <a:lstStyle/>
-          <a:p>
-            <a:pPr algn="ctr"/>
-          </a:p>
-        </p:txBody>
-      </p:sp>
-      <p:sp>
-        <p:nvSpPr>
-          <p:cNvPr id="34" name="Oval 33"/>
-          <p:cNvSpPr/>
-          <p:nvPr/>
-        </p:nvSpPr>
-        <p:spPr>
-          <a:xfrm rot="4320000">
-            <a:off x="2908297" y="1103281"/>
-            <a:ext cx="74880" cy="126720"/>
-          </a:xfrm>
-          <a:prstGeom prst="ellipse">
-            <a:avLst/>
-          </a:prstGeom>
-          <a:solidFill>
-            <a:srgbClr val="3B8B91"/>
-          </a:solidFill>
-          <a:ln>
-            <a:noFill/>
-          </a:ln>
-        </p:spPr>
-        <p:txBody>
-          <a:bodyPr rtlCol="0" anchor="ctr"/>
-          <a:lstStyle/>
-          <a:p>
-            <a:pPr algn="ctr"/>
-          </a:p>
-        </p:txBody>
-      </p:sp>
-      <p:sp>
-        <p:nvSpPr>
-          <p:cNvPr id="35" name="Oval 34"/>
-          <p:cNvSpPr/>
-          <p:nvPr/>
-        </p:nvSpPr>
-        <p:spPr>
-          <a:xfrm rot="8640000">
-            <a:off x="2883188" y="1180559"/>
-            <a:ext cx="74880" cy="126720"/>
-          </a:xfrm>
-          <a:prstGeom prst="ellipse">
-            <a:avLst/>
-          </a:prstGeom>
-          <a:solidFill>
-            <a:srgbClr val="3B8B91"/>
-          </a:solidFill>
-          <a:ln>
-            <a:noFill/>
-          </a:ln>
-        </p:spPr>
-        <p:txBody>
-          <a:bodyPr rtlCol="0" anchor="ctr"/>
-          <a:lstStyle/>
-          <a:p>
-            <a:pPr algn="ctr"/>
-          </a:p>
-        </p:txBody>
-      </p:sp>
-      <p:sp>
-        <p:nvSpPr>
-          <p:cNvPr id="36" name="Oval 35"/>
-          <p:cNvSpPr/>
-          <p:nvPr/>
-        </p:nvSpPr>
-        <p:spPr>
-          <a:xfrm rot="12960000">
-            <a:off x="2801932" y="1180559"/>
-            <a:ext cx="74880" cy="126720"/>
-          </a:xfrm>
-          <a:prstGeom prst="ellipse">
-            <a:avLst/>
-          </a:prstGeom>
-          <a:solidFill>
-            <a:srgbClr val="3B8B91"/>
-          </a:solidFill>
-          <a:ln>
-            <a:noFill/>
-          </a:ln>
-        </p:spPr>
-        <p:txBody>
-          <a:bodyPr rtlCol="0" anchor="ctr"/>
-          <a:lstStyle/>
-          <a:p>
-            <a:pPr algn="ctr"/>
-          </a:p>
-        </p:txBody>
-      </p:sp>
-      <p:sp>
-        <p:nvSpPr>
-          <p:cNvPr id="37" name="Oval 36"/>
-          <p:cNvSpPr/>
-          <p:nvPr/>
-        </p:nvSpPr>
-        <p:spPr>
-          <a:xfrm rot="17280000">
-            <a:off x="2776823" y="1103281"/>
-            <a:ext cx="74880" cy="126720"/>
-          </a:xfrm>
-          <a:prstGeom prst="ellipse">
-            <a:avLst/>
-          </a:prstGeom>
-          <a:solidFill>
-            <a:srgbClr val="3B8B91"/>
-          </a:solidFill>
-          <a:ln>
-            <a:noFill/>
-          </a:ln>
-        </p:spPr>
-        <p:txBody>
-          <a:bodyPr rtlCol="0" anchor="ctr"/>
-          <a:lstStyle/>
-          <a:p>
-            <a:pPr algn="ctr"/>
-          </a:p>
-        </p:txBody>
-      </p:sp>
-      <p:sp>
-        <p:nvSpPr>
-          <p:cNvPr id="38" name="Oval 37"/>
-          <p:cNvSpPr/>
-          <p:nvPr/>
-        </p:nvSpPr>
-        <p:spPr>
-          <a:xfrm>
-            <a:off x="2848320" y="1156320"/>
-            <a:ext cx="63360" cy="63360"/>
-          </a:xfrm>
-          <a:prstGeom prst="ellipse">
-            <a:avLst/>
-          </a:prstGeom>
-          <a:solidFill>
-            <a:srgbClr val="C8DFE0"/>
-          </a:solidFill>
-          <a:ln>
-            <a:noFill/>
-          </a:ln>
-        </p:spPr>
-        <p:txBody>
-          <a:bodyPr rtlCol="0" anchor="ctr"/>
-          <a:lstStyle/>
-          <a:p>
-            <a:pPr algn="ctr"/>
           </a:p>
         </p:txBody>
       </p:sp>
@@ -4323,7 +3380,7 @@
     <p:bg>
       <p:bgPr>
         <a:solidFill>
-          <a:srgbClr val="FBF8F2"/>
+          <a:srgbClr val="F3F4F6"/>
         </a:solidFill>
         <a:effectLst/>
       </p:bgPr>
@@ -4335,445 +3392,26 @@
         <p:nvPr/>
       </p:nvGrpSpPr>
       <p:grpSpPr/>
-      <p:cxnSp>
-        <p:nvCxnSpPr>
-          <p:cNvPr id="2" name="Connector 1"/>
-          <p:cNvCxnSpPr/>
+      <p:sp>
+        <p:nvSpPr>
+          <p:cNvPr id="2" name="Rectangle 1"/>
+          <p:cNvSpPr/>
           <p:nvPr/>
-        </p:nvCxnSpPr>
+        </p:nvSpPr>
         <p:spPr>
           <a:xfrm>
-            <a:off x="0" y="93600"/>
-            <a:ext cx="3240000" cy="0"/>
-          </a:xfrm>
-          <a:prstGeom prst="line">
-            <a:avLst/>
-          </a:prstGeom>
-          <a:ln w="7200">
-            <a:solidFill>
-              <a:srgbClr val="3B8B91">
-                <a:alpha val="30000"/>
-              </a:srgbClr>
-            </a:solidFill>
-          </a:ln>
-        </p:spPr>
-      </p:cxnSp>
-      <p:cxnSp>
-        <p:nvCxnSpPr>
-          <p:cNvPr id="3" name="Connector 2"/>
-          <p:cNvCxnSpPr/>
-          <p:nvPr/>
-        </p:nvCxnSpPr>
-        <p:spPr>
-          <a:xfrm>
-            <a:off x="0" y="201600"/>
-            <a:ext cx="3240000" cy="0"/>
-          </a:xfrm>
-          <a:prstGeom prst="line">
-            <a:avLst/>
-          </a:prstGeom>
-          <a:ln w="7200">
-            <a:solidFill>
-              <a:srgbClr val="3B8B91">
-                <a:alpha val="30000"/>
-              </a:srgbClr>
-            </a:solidFill>
-          </a:ln>
-        </p:spPr>
-      </p:cxnSp>
-      <p:cxnSp>
-        <p:nvCxnSpPr>
-          <p:cNvPr id="4" name="Connector 3"/>
-          <p:cNvCxnSpPr/>
-          <p:nvPr/>
-        </p:nvCxnSpPr>
-        <p:spPr>
-          <a:xfrm>
-            <a:off x="0" y="309600"/>
-            <a:ext cx="3240000" cy="0"/>
-          </a:xfrm>
-          <a:prstGeom prst="line">
-            <a:avLst/>
-          </a:prstGeom>
-          <a:ln w="7200">
-            <a:solidFill>
-              <a:srgbClr val="3B8B91">
-                <a:alpha val="30000"/>
-              </a:srgbClr>
-            </a:solidFill>
-          </a:ln>
-        </p:spPr>
-      </p:cxnSp>
-      <p:cxnSp>
-        <p:nvCxnSpPr>
-          <p:cNvPr id="5" name="Connector 4"/>
-          <p:cNvCxnSpPr/>
-          <p:nvPr/>
-        </p:nvCxnSpPr>
-        <p:spPr>
-          <a:xfrm>
-            <a:off x="0" y="417600"/>
-            <a:ext cx="3240000" cy="0"/>
-          </a:xfrm>
-          <a:prstGeom prst="line">
-            <a:avLst/>
-          </a:prstGeom>
-          <a:ln w="7200">
-            <a:solidFill>
-              <a:srgbClr val="3B8B91">
-                <a:alpha val="30000"/>
-              </a:srgbClr>
-            </a:solidFill>
-          </a:ln>
-        </p:spPr>
-      </p:cxnSp>
-      <p:cxnSp>
-        <p:nvCxnSpPr>
-          <p:cNvPr id="6" name="Connector 5"/>
-          <p:cNvCxnSpPr/>
-          <p:nvPr/>
-        </p:nvCxnSpPr>
-        <p:spPr>
-          <a:xfrm>
-            <a:off x="0" y="525600"/>
-            <a:ext cx="3240000" cy="0"/>
-          </a:xfrm>
-          <a:prstGeom prst="line">
-            <a:avLst/>
-          </a:prstGeom>
-          <a:ln w="7200">
-            <a:solidFill>
-              <a:srgbClr val="3B8B91">
-                <a:alpha val="30000"/>
-              </a:srgbClr>
-            </a:solidFill>
-          </a:ln>
-        </p:spPr>
-      </p:cxnSp>
-      <p:cxnSp>
-        <p:nvCxnSpPr>
-          <p:cNvPr id="7" name="Connector 6"/>
-          <p:cNvCxnSpPr/>
-          <p:nvPr/>
-        </p:nvCxnSpPr>
-        <p:spPr>
-          <a:xfrm>
-            <a:off x="0" y="633600"/>
-            <a:ext cx="3240000" cy="0"/>
-          </a:xfrm>
-          <a:prstGeom prst="line">
-            <a:avLst/>
-          </a:prstGeom>
-          <a:ln w="7200">
-            <a:solidFill>
-              <a:srgbClr val="3B8B91">
-                <a:alpha val="30000"/>
-              </a:srgbClr>
-            </a:solidFill>
-          </a:ln>
-        </p:spPr>
-      </p:cxnSp>
-      <p:cxnSp>
-        <p:nvCxnSpPr>
-          <p:cNvPr id="8" name="Connector 7"/>
-          <p:cNvCxnSpPr/>
-          <p:nvPr/>
-        </p:nvCxnSpPr>
-        <p:spPr>
-          <a:xfrm>
-            <a:off x="0" y="741600"/>
-            <a:ext cx="3240000" cy="0"/>
-          </a:xfrm>
-          <a:prstGeom prst="line">
-            <a:avLst/>
-          </a:prstGeom>
-          <a:ln w="7200">
-            <a:solidFill>
-              <a:srgbClr val="3B8B91">
-                <a:alpha val="30000"/>
-              </a:srgbClr>
-            </a:solidFill>
-          </a:ln>
-        </p:spPr>
-      </p:cxnSp>
-      <p:cxnSp>
-        <p:nvCxnSpPr>
-          <p:cNvPr id="9" name="Connector 8"/>
-          <p:cNvCxnSpPr/>
-          <p:nvPr/>
-        </p:nvCxnSpPr>
-        <p:spPr>
-          <a:xfrm>
-            <a:off x="0" y="849600"/>
-            <a:ext cx="3240000" cy="0"/>
-          </a:xfrm>
-          <a:prstGeom prst="line">
-            <a:avLst/>
-          </a:prstGeom>
-          <a:ln w="7200">
-            <a:solidFill>
-              <a:srgbClr val="3B8B91">
-                <a:alpha val="30000"/>
-              </a:srgbClr>
-            </a:solidFill>
-          </a:ln>
-        </p:spPr>
-      </p:cxnSp>
-      <p:cxnSp>
-        <p:nvCxnSpPr>
-          <p:cNvPr id="10" name="Connector 9"/>
-          <p:cNvCxnSpPr/>
-          <p:nvPr/>
-        </p:nvCxnSpPr>
-        <p:spPr>
-          <a:xfrm>
-            <a:off x="0" y="957600"/>
-            <a:ext cx="3240000" cy="0"/>
-          </a:xfrm>
-          <a:prstGeom prst="line">
-            <a:avLst/>
-          </a:prstGeom>
-          <a:ln w="7200">
-            <a:solidFill>
-              <a:srgbClr val="3B8B91">
-                <a:alpha val="30000"/>
-              </a:srgbClr>
-            </a:solidFill>
-          </a:ln>
-        </p:spPr>
-      </p:cxnSp>
-      <p:cxnSp>
-        <p:nvCxnSpPr>
-          <p:cNvPr id="11" name="Connector 10"/>
-          <p:cNvCxnSpPr/>
-          <p:nvPr/>
-        </p:nvCxnSpPr>
-        <p:spPr>
-          <a:xfrm>
-            <a:off x="0" y="1065600"/>
-            <a:ext cx="3240000" cy="0"/>
-          </a:xfrm>
-          <a:prstGeom prst="line">
-            <a:avLst/>
-          </a:prstGeom>
-          <a:ln w="7200">
-            <a:solidFill>
-              <a:srgbClr val="3B8B91">
-                <a:alpha val="30000"/>
-              </a:srgbClr>
-            </a:solidFill>
-          </a:ln>
-        </p:spPr>
-      </p:cxnSp>
-      <p:cxnSp>
-        <p:nvCxnSpPr>
-          <p:cNvPr id="12" name="Connector 11"/>
-          <p:cNvCxnSpPr/>
-          <p:nvPr/>
-        </p:nvCxnSpPr>
-        <p:spPr>
-          <a:xfrm>
-            <a:off x="0" y="1173600"/>
-            <a:ext cx="3240000" cy="0"/>
-          </a:xfrm>
-          <a:prstGeom prst="line">
-            <a:avLst/>
-          </a:prstGeom>
-          <a:ln w="7200">
-            <a:solidFill>
-              <a:srgbClr val="3B8B91">
-                <a:alpha val="30000"/>
-              </a:srgbClr>
-            </a:solidFill>
-          </a:ln>
-        </p:spPr>
-      </p:cxnSp>
-      <p:cxnSp>
-        <p:nvCxnSpPr>
-          <p:cNvPr id="13" name="Connector 12"/>
-          <p:cNvCxnSpPr/>
-          <p:nvPr/>
-        </p:nvCxnSpPr>
-        <p:spPr>
-          <a:xfrm>
-            <a:off x="0" y="1281600"/>
-            <a:ext cx="3240000" cy="0"/>
-          </a:xfrm>
-          <a:prstGeom prst="line">
-            <a:avLst/>
-          </a:prstGeom>
-          <a:ln w="7200">
-            <a:solidFill>
-              <a:srgbClr val="3B8B91">
-                <a:alpha val="30000"/>
-              </a:srgbClr>
-            </a:solidFill>
-          </a:ln>
-        </p:spPr>
-      </p:cxnSp>
-      <p:cxnSp>
-        <p:nvCxnSpPr>
-          <p:cNvPr id="14" name="Connector 13"/>
-          <p:cNvCxnSpPr/>
-          <p:nvPr/>
-        </p:nvCxnSpPr>
-        <p:spPr>
-          <a:xfrm>
-            <a:off x="0" y="1389600"/>
-            <a:ext cx="3240000" cy="0"/>
-          </a:xfrm>
-          <a:prstGeom prst="line">
-            <a:avLst/>
-          </a:prstGeom>
-          <a:ln w="7200">
-            <a:solidFill>
-              <a:srgbClr val="3B8B91">
-                <a:alpha val="30000"/>
-              </a:srgbClr>
-            </a:solidFill>
-          </a:ln>
-        </p:spPr>
-      </p:cxnSp>
-      <p:cxnSp>
-        <p:nvCxnSpPr>
-          <p:cNvPr id="15" name="Connector 14"/>
-          <p:cNvCxnSpPr/>
-          <p:nvPr/>
-        </p:nvCxnSpPr>
-        <p:spPr>
-          <a:xfrm>
-            <a:off x="0" y="1497600"/>
-            <a:ext cx="3240000" cy="0"/>
-          </a:xfrm>
-          <a:prstGeom prst="line">
-            <a:avLst/>
-          </a:prstGeom>
-          <a:ln w="7200">
-            <a:solidFill>
-              <a:srgbClr val="3B8B91">
-                <a:alpha val="30000"/>
-              </a:srgbClr>
-            </a:solidFill>
-          </a:ln>
-        </p:spPr>
-      </p:cxnSp>
-      <p:cxnSp>
-        <p:nvCxnSpPr>
-          <p:cNvPr id="16" name="Connector 15"/>
-          <p:cNvCxnSpPr/>
-          <p:nvPr/>
-        </p:nvCxnSpPr>
-        <p:spPr>
-          <a:xfrm>
-            <a:off x="0" y="1605600"/>
-            <a:ext cx="3240000" cy="0"/>
-          </a:xfrm>
-          <a:prstGeom prst="line">
-            <a:avLst/>
-          </a:prstGeom>
-          <a:ln w="7200">
-            <a:solidFill>
-              <a:srgbClr val="3B8B91">
-                <a:alpha val="30000"/>
-              </a:srgbClr>
-            </a:solidFill>
-          </a:ln>
-        </p:spPr>
-      </p:cxnSp>
-      <p:cxnSp>
-        <p:nvCxnSpPr>
-          <p:cNvPr id="17" name="Connector 16"/>
-          <p:cNvCxnSpPr/>
-          <p:nvPr/>
-        </p:nvCxnSpPr>
-        <p:spPr>
-          <a:xfrm>
-            <a:off x="0" y="1713600"/>
-            <a:ext cx="3240000" cy="0"/>
-          </a:xfrm>
-          <a:prstGeom prst="line">
-            <a:avLst/>
-          </a:prstGeom>
-          <a:ln w="7200">
-            <a:solidFill>
-              <a:srgbClr val="3B8B91">
-                <a:alpha val="30000"/>
-              </a:srgbClr>
-            </a:solidFill>
-          </a:ln>
-        </p:spPr>
-      </p:cxnSp>
-      <p:cxnSp>
-        <p:nvCxnSpPr>
-          <p:cNvPr id="18" name="Connector 17"/>
-          <p:cNvCxnSpPr/>
-          <p:nvPr/>
-        </p:nvCxnSpPr>
-        <p:spPr>
-          <a:xfrm>
-            <a:off x="0" y="1821600"/>
-            <a:ext cx="3240000" cy="0"/>
-          </a:xfrm>
-          <a:prstGeom prst="line">
-            <a:avLst/>
-          </a:prstGeom>
-          <a:ln w="7200">
-            <a:solidFill>
-              <a:srgbClr val="3B8B91">
-                <a:alpha val="30000"/>
-              </a:srgbClr>
-            </a:solidFill>
-          </a:ln>
-        </p:spPr>
-      </p:cxnSp>
-      <p:sp>
-        <p:nvSpPr>
-          <p:cNvPr id="19" name="Rectangle 18"/>
-          <p:cNvSpPr/>
-          <p:nvPr/>
-        </p:nvSpPr>
-        <p:spPr>
-          <a:xfrm>
-            <a:off x="468000" y="468000"/>
-            <a:ext cx="2304000" cy="864000"/>
-          </a:xfrm>
-          <a:prstGeom prst="rect">
-            <a:avLst/>
-          </a:prstGeom>
-          <a:solidFill>
-            <a:srgbClr val="FBF8F2"/>
-          </a:solidFill>
-          <a:ln>
-            <a:noFill/>
-          </a:ln>
-        </p:spPr>
-        <p:txBody>
-          <a:bodyPr rtlCol="0" anchor="ctr"/>
-          <a:lstStyle/>
-          <a:p>
-            <a:pPr algn="ctr"/>
-          </a:p>
-        </p:txBody>
-      </p:sp>
-      <p:sp>
-        <p:nvSpPr>
-          <p:cNvPr id="20" name="Rectangle 19"/>
-          <p:cNvSpPr/>
-          <p:nvPr/>
-        </p:nvSpPr>
-        <p:spPr>
-          <a:xfrm>
-            <a:off x="468000" y="468000"/>
-            <a:ext cx="2304000" cy="864000"/>
+            <a:off x="2304000" y="504000"/>
+            <a:ext cx="684000" cy="684000"/>
           </a:xfrm>
           <a:prstGeom prst="rect">
             <a:avLst/>
           </a:prstGeom>
           <a:noFill/>
-          <a:ln w="9000">
+          <a:ln w="7200">
             <a:solidFill>
-              <a:srgbClr val="3B8B91"/>
+              <a:srgbClr val="6B7280"/>
             </a:solidFill>
+            <a:prstDash val="dash"/>
           </a:ln>
         </p:spPr>
         <p:txBody>
@@ -4786,14 +3424,14 @@
       </p:sp>
       <p:sp>
         <p:nvSpPr>
-          <p:cNvPr id="21" name="텍스트"/>
+          <p:cNvPr id="3" name="텍스트"/>
           <p:cNvSpPr txBox="1"/>
           <p:nvPr/>
         </p:nvSpPr>
         <p:spPr>
           <a:xfrm>
-            <a:off x="576000" y="540000"/>
-            <a:ext cx="2088000" cy="720000"/>
+            <a:off x="2304000" y="504000"/>
+            <a:ext cx="684000" cy="684000"/>
           </a:xfrm>
           <a:prstGeom prst="rect">
             <a:avLst/>
@@ -4808,32 +3446,32 @@
           <a:p>
             <a:pPr algn="ctr">
               <a:lnSpc>
-                <a:spcPts val="1667"/>
+                <a:spcPts val="1595"/>
               </a:lnSpc>
             </a:pPr>
             <a:r>
-              <a:rPr sz="1150" b="1">
+              <a:rPr sz="1100" b="1">
                 <a:solidFill>
-                  <a:srgbClr val="5B3D15"/>
+                  <a:srgbClr val="6B7280"/>
                 </a:solidFill>
-                <a:latin typeface="바탕"/>
-                <a:ea typeface="바탕"/>
+                <a:latin typeface="맑은 고딕"/>
+                <a:ea typeface="맑은 고딕"/>
               </a:rPr>
-              <a:t>당신의 하루를 환하게</a:t>
-            </a:r>
-          </a:p>
-        </p:txBody>
-      </p:sp>
-      <p:sp>
-        <p:nvSpPr>
-          <p:cNvPr id="22" name="텍스트"/>
+              <a:t>QR</a:t>
+            </a:r>
+          </a:p>
+        </p:txBody>
+      </p:sp>
+      <p:sp>
+        <p:nvSpPr>
+          <p:cNvPr id="4" name="텍스트"/>
           <p:cNvSpPr txBox="1"/>
           <p:nvPr/>
         </p:nvSpPr>
         <p:spPr>
           <a:xfrm>
-            <a:off x="360000" y="1468800"/>
-            <a:ext cx="2520000" cy="108000"/>
+            <a:off x="252000" y="504000"/>
+            <a:ext cx="1728000" cy="720000"/>
           </a:xfrm>
           <a:prstGeom prst="rect">
             <a:avLst/>
@@ -4846,15 +3484,84 @@
           </a:bodyPr>
           <a:lstStyle/>
           <a:p>
-            <a:pPr algn="ctr">
+            <a:pPr algn="l">
+              <a:lnSpc>
+                <a:spcPts val="1739"/>
+              </a:lnSpc>
+            </a:pPr>
+            <a:r>
+              <a:rPr sz="1200" b="1">
+                <a:solidFill>
+                  <a:srgbClr val="12151C"/>
+                </a:solidFill>
+                <a:latin typeface="맑은 고딕"/>
+                <a:ea typeface="맑은 고딕"/>
+              </a:rPr>
+              <a:t>당신의 하루를 환하게</a:t>
+            </a:r>
+          </a:p>
+        </p:txBody>
+      </p:sp>
+      <p:sp>
+        <p:nvSpPr>
+          <p:cNvPr id="5" name="Rectangle 4"/>
+          <p:cNvSpPr/>
+          <p:nvPr/>
+        </p:nvSpPr>
+        <p:spPr>
+          <a:xfrm>
+            <a:off x="252000" y="1296000"/>
+            <a:ext cx="144000" cy="18000"/>
+          </a:xfrm>
+          <a:prstGeom prst="rect">
+            <a:avLst/>
+          </a:prstGeom>
+          <a:solidFill>
+            <a:srgbClr val="FF6F8E"/>
+          </a:solidFill>
+          <a:ln>
+            <a:noFill/>
+          </a:ln>
+        </p:spPr>
+        <p:txBody>
+          <a:bodyPr rtlCol="0" anchor="ctr"/>
+          <a:lstStyle/>
+          <a:p>
+            <a:pPr algn="ctr"/>
+          </a:p>
+        </p:txBody>
+      </p:sp>
+      <p:sp>
+        <p:nvSpPr>
+          <p:cNvPr id="6" name="텍스트"/>
+          <p:cNvSpPr txBox="1"/>
+          <p:nvPr/>
+        </p:nvSpPr>
+        <p:spPr>
+          <a:xfrm>
+            <a:off x="252000" y="1404000"/>
+            <a:ext cx="1656000" cy="133351"/>
+          </a:xfrm>
+          <a:prstGeom prst="rect">
+            <a:avLst/>
+          </a:prstGeom>
+          <a:noFill/>
+        </p:spPr>
+        <p:txBody>
+          <a:bodyPr wrap="square" lIns="0" rIns="0" tIns="0" bIns="0" anchor="t">
+            <a:spAutoFit/>
+          </a:bodyPr>
+          <a:lstStyle/>
+          <a:p>
+            <a:pPr algn="l">
               <a:lnSpc>
                 <a:spcPts val="1015"/>
               </a:lnSpc>
             </a:pPr>
             <a:r>
-              <a:rPr sz="700" b="1" spc="300">
+              <a:rPr sz="700" b="1" spc="200">
                 <a:solidFill>
-                  <a:srgbClr val="7D6B53"/>
+                  <a:srgbClr val="6B7280"/>
                 </a:solidFill>
                 <a:latin typeface="맑은 고딕"/>
                 <a:ea typeface="맑은 고딕"/>

--- a/public/fun/cards/beauty/beauty-30.pptx
+++ b/public/fun/cards/beauty/beauty-30.pptx
@@ -3105,8 +3105,8 @@
         </p:nvSpPr>
         <p:spPr>
           <a:xfrm>
-            <a:off x="252000" y="223200"/>
-            <a:ext cx="2016000" cy="133351"/>
+            <a:off x="252000" y="252000"/>
+            <a:ext cx="1512000" cy="123826"/>
           </a:xfrm>
           <a:prstGeom prst="rect">
             <a:avLst/>
@@ -3121,11 +3121,11 @@
           <a:p>
             <a:pPr algn="l">
               <a:lnSpc>
-                <a:spcPts val="1015"/>
+                <a:spcPts val="942"/>
               </a:lnSpc>
             </a:pPr>
             <a:r>
-              <a:rPr sz="700" b="1" spc="200">
+              <a:rPr sz="650" b="1" spc="220">
                 <a:solidFill>
                   <a:srgbClr val="6C3747"/>
                 </a:solidFill>
@@ -3137,16 +3137,37 @@
           </a:p>
         </p:txBody>
       </p:sp>
-      <p:sp>
-        <p:nvSpPr>
-          <p:cNvPr id="3" name="텍스트"/>
+      <p:cxnSp>
+        <p:nvCxnSpPr>
+          <p:cNvPr id="3" name="Connector 2"/>
+          <p:cNvCxnSpPr/>
+          <p:nvPr/>
+        </p:nvCxnSpPr>
+        <p:spPr>
+          <a:xfrm>
+            <a:off x="252000" y="388800"/>
+            <a:ext cx="2736000" cy="0"/>
+          </a:xfrm>
+          <a:prstGeom prst="line">
+            <a:avLst/>
+          </a:prstGeom>
+          <a:ln w="3600">
+            <a:solidFill>
+              <a:srgbClr val="FFD7DF"/>
+            </a:solidFill>
+          </a:ln>
+        </p:spPr>
+      </p:cxnSp>
+      <p:sp>
+        <p:nvSpPr>
+          <p:cNvPr id="4" name="텍스트"/>
           <p:cNvSpPr txBox="1"/>
           <p:nvPr/>
         </p:nvSpPr>
         <p:spPr>
           <a:xfrm>
-            <a:off x="252000" y="468000"/>
-            <a:ext cx="2520000" cy="360000"/>
+            <a:off x="252000" y="576000"/>
+            <a:ext cx="1800000" cy="237600"/>
           </a:xfrm>
           <a:prstGeom prst="rect">
             <a:avLst/>
@@ -3161,11 +3182,11 @@
           <a:p>
             <a:pPr algn="l">
               <a:lnSpc>
-                <a:spcPts val="3190"/>
+                <a:spcPts val="1957"/>
               </a:lnSpc>
             </a:pPr>
             <a:r>
-              <a:rPr sz="2200" b="1">
+              <a:rPr sz="1350" b="1" spc="120">
                 <a:solidFill>
                   <a:srgbClr val="12151C"/>
                 </a:solidFill>
@@ -3179,14 +3200,14 @@
       </p:sp>
       <p:sp>
         <p:nvSpPr>
-          <p:cNvPr id="4" name="텍스트"/>
+          <p:cNvPr id="5" name="텍스트"/>
           <p:cNvSpPr txBox="1"/>
           <p:nvPr/>
         </p:nvSpPr>
         <p:spPr>
           <a:xfrm>
-            <a:off x="252000" y="871200"/>
-            <a:ext cx="2520000" cy="171451"/>
+            <a:off x="252000" y="828000"/>
+            <a:ext cx="1800000" cy="133351"/>
           </a:xfrm>
           <a:prstGeom prst="rect">
             <a:avLst/>
@@ -3201,11 +3222,11 @@
           <a:p>
             <a:pPr algn="l">
               <a:lnSpc>
-                <a:spcPts val="1305"/>
+                <a:spcPts val="1015"/>
               </a:lnSpc>
             </a:pPr>
             <a:r>
-              <a:rPr sz="900" b="0">
+              <a:rPr sz="700" b="0" spc="60">
                 <a:solidFill>
                   <a:srgbClr val="6C3747"/>
                 </a:solidFill>
@@ -3219,14 +3240,14 @@
       </p:sp>
       <p:sp>
         <p:nvSpPr>
-          <p:cNvPr id="5" name="텍스트"/>
+          <p:cNvPr id="6" name="텍스트"/>
           <p:cNvSpPr txBox="1"/>
           <p:nvPr/>
         </p:nvSpPr>
         <p:spPr>
           <a:xfrm>
-            <a:off x="252000" y="1216800"/>
-            <a:ext cx="2520000" cy="129541"/>
+            <a:off x="252000" y="1036800"/>
+            <a:ext cx="2520000" cy="123826"/>
           </a:xfrm>
           <a:prstGeom prst="rect">
             <a:avLst/>
@@ -3241,11 +3262,11 @@
           <a:p>
             <a:pPr algn="l">
               <a:lnSpc>
-                <a:spcPts val="986"/>
+                <a:spcPts val="942"/>
               </a:lnSpc>
             </a:pPr>
             <a:r>
-              <a:rPr sz="680" b="0">
+              <a:rPr sz="650" b="0">
                 <a:solidFill>
                   <a:srgbClr val="6C3747"/>
                 </a:solidFill>
@@ -3259,14 +3280,14 @@
       </p:sp>
       <p:sp>
         <p:nvSpPr>
-          <p:cNvPr id="6" name="Rectangle 5"/>
+          <p:cNvPr id="7" name="Rectangle 6"/>
           <p:cNvSpPr/>
           <p:nvPr/>
         </p:nvSpPr>
         <p:spPr>
           <a:xfrm>
-            <a:off x="0" y="1476000"/>
-            <a:ext cx="3240000" cy="324000"/>
+            <a:off x="0" y="1339200"/>
+            <a:ext cx="3240000" cy="460800"/>
           </a:xfrm>
           <a:prstGeom prst="rect">
             <a:avLst/>
@@ -3288,14 +3309,14 @@
       </p:sp>
       <p:sp>
         <p:nvSpPr>
-          <p:cNvPr id="7" name="텍스트"/>
+          <p:cNvPr id="8" name="텍스트"/>
           <p:cNvSpPr txBox="1"/>
           <p:nvPr/>
         </p:nvSpPr>
         <p:spPr>
           <a:xfrm>
-            <a:off x="252000" y="1569600"/>
-            <a:ext cx="1296000" cy="133351"/>
+            <a:off x="252000" y="1476000"/>
+            <a:ext cx="936000" cy="91441"/>
           </a:xfrm>
           <a:prstGeom prst="rect">
             <a:avLst/>
@@ -3310,11 +3331,53 @@
           <a:p>
             <a:pPr algn="l">
               <a:lnSpc>
-                <a:spcPts val="1015"/>
+                <a:spcPts val="696"/>
               </a:lnSpc>
             </a:pPr>
             <a:r>
-              <a:rPr sz="700" b="1">
+              <a:rPr sz="480" b="1" spc="140">
+                <a:solidFill>
+                  <a:srgbClr val="12151C">
+                    <a:alpha val="70000"/>
+                  </a:srgbClr>
+                </a:solidFill>
+                <a:latin typeface="맑은 고딕"/>
+                <a:ea typeface="맑은 고딕"/>
+              </a:rPr>
+              <a:t>TEL</a:t>
+            </a:r>
+          </a:p>
+        </p:txBody>
+      </p:sp>
+      <p:sp>
+        <p:nvSpPr>
+          <p:cNvPr id="9" name="텍스트"/>
+          <p:cNvSpPr txBox="1"/>
+          <p:nvPr/>
+        </p:nvSpPr>
+        <p:spPr>
+          <a:xfrm>
+            <a:off x="252000" y="1576800"/>
+            <a:ext cx="936000" cy="123826"/>
+          </a:xfrm>
+          <a:prstGeom prst="rect">
+            <a:avLst/>
+          </a:prstGeom>
+          <a:noFill/>
+        </p:spPr>
+        <p:txBody>
+          <a:bodyPr wrap="square" lIns="0" rIns="0" tIns="0" bIns="0" anchor="t">
+            <a:spAutoFit/>
+          </a:bodyPr>
+          <a:lstStyle/>
+          <a:p>
+            <a:pPr algn="l">
+              <a:lnSpc>
+                <a:spcPts val="942"/>
+              </a:lnSpc>
+            </a:pPr>
+            <a:r>
+              <a:rPr sz="650" b="1">
                 <a:solidFill>
                   <a:srgbClr val="12151C"/>
                 </a:solidFill>
@@ -3328,14 +3391,14 @@
       </p:sp>
       <p:sp>
         <p:nvSpPr>
-          <p:cNvPr id="8" name="텍스트"/>
+          <p:cNvPr id="10" name="텍스트"/>
           <p:cNvSpPr txBox="1"/>
           <p:nvPr/>
         </p:nvSpPr>
         <p:spPr>
           <a:xfrm>
-            <a:off x="1656000" y="1569600"/>
-            <a:ext cx="1368000" cy="133351"/>
+            <a:off x="1188000" y="1476000"/>
+            <a:ext cx="1080000" cy="91441"/>
           </a:xfrm>
           <a:prstGeom prst="rect">
             <a:avLst/>
@@ -3350,11 +3413,53 @@
           <a:p>
             <a:pPr algn="l">
               <a:lnSpc>
-                <a:spcPts val="1015"/>
+                <a:spcPts val="696"/>
               </a:lnSpc>
             </a:pPr>
             <a:r>
-              <a:rPr sz="700" b="1">
+              <a:rPr sz="480" b="1" spc="140">
+                <a:solidFill>
+                  <a:srgbClr val="12151C">
+                    <a:alpha val="70000"/>
+                  </a:srgbClr>
+                </a:solidFill>
+                <a:latin typeface="맑은 고딕"/>
+                <a:ea typeface="맑은 고딕"/>
+              </a:rPr>
+              <a:t>MAIL</a:t>
+            </a:r>
+          </a:p>
+        </p:txBody>
+      </p:sp>
+      <p:sp>
+        <p:nvSpPr>
+          <p:cNvPr id="11" name="텍스트"/>
+          <p:cNvSpPr txBox="1"/>
+          <p:nvPr/>
+        </p:nvSpPr>
+        <p:spPr>
+          <a:xfrm>
+            <a:off x="1188000" y="1576800"/>
+            <a:ext cx="1080000" cy="123826"/>
+          </a:xfrm>
+          <a:prstGeom prst="rect">
+            <a:avLst/>
+          </a:prstGeom>
+          <a:noFill/>
+        </p:spPr>
+        <p:txBody>
+          <a:bodyPr wrap="square" lIns="0" rIns="0" tIns="0" bIns="0" anchor="t">
+            <a:spAutoFit/>
+          </a:bodyPr>
+          <a:lstStyle/>
+          <a:p>
+            <a:pPr algn="l">
+              <a:lnSpc>
+                <a:spcPts val="942"/>
+              </a:lnSpc>
+            </a:pPr>
+            <a:r>
+              <a:rPr sz="650" b="1">
                 <a:solidFill>
                   <a:srgbClr val="12151C"/>
                 </a:solidFill>
@@ -3366,6 +3471,27 @@
           </a:p>
         </p:txBody>
       </p:sp>
+      <p:cxnSp>
+        <p:nvCxnSpPr>
+          <p:cNvPr id="12" name="Connector 11"/>
+          <p:cNvCxnSpPr/>
+          <p:nvPr/>
+        </p:nvCxnSpPr>
+        <p:spPr>
+          <a:xfrm>
+            <a:off x="1108800" y="1468800"/>
+            <a:ext cx="0" cy="208800"/>
+          </a:xfrm>
+          <a:prstGeom prst="line">
+            <a:avLst/>
+          </a:prstGeom>
+          <a:ln w="3600">
+            <a:solidFill>
+              <a:srgbClr val="12151C"/>
+            </a:solidFill>
+          </a:ln>
+        </p:spPr>
+      </p:cxnSp>
     </p:spTree>
   </p:cSld>
   <p:clrMapOvr>
@@ -3392,22 +3518,548 @@
         <p:nvPr/>
       </p:nvGrpSpPr>
       <p:grpSpPr/>
-      <p:sp>
-        <p:nvSpPr>
-          <p:cNvPr id="2" name="Rectangle 1"/>
-          <p:cNvSpPr/>
+      <p:cxnSp>
+        <p:nvCxnSpPr>
+          <p:cNvPr id="2" name="Connector 1"/>
+          <p:cNvCxnSpPr/>
           <p:nvPr/>
-        </p:nvSpPr>
-        <p:spPr>
-          <a:xfrm>
-            <a:off x="2304000" y="504000"/>
-            <a:ext cx="684000" cy="684000"/>
+        </p:nvCxnSpPr>
+        <p:spPr>
+          <a:xfrm>
+            <a:off x="396000" y="360000"/>
+            <a:ext cx="0" cy="648000"/>
+          </a:xfrm>
+          <a:prstGeom prst="line">
+            <a:avLst/>
+          </a:prstGeom>
+          <a:ln w="5760">
+            <a:solidFill>
+              <a:srgbClr val="FF6F8E"/>
+            </a:solidFill>
+          </a:ln>
+        </p:spPr>
+      </p:cxnSp>
+      <p:sp>
+        <p:nvSpPr>
+          <p:cNvPr id="3" name="텍스트"/>
+          <p:cNvSpPr txBox="1"/>
+          <p:nvPr/>
+        </p:nvSpPr>
+        <p:spPr>
+          <a:xfrm>
+            <a:off x="252000" y="187200"/>
+            <a:ext cx="1440000" cy="99061"/>
           </a:xfrm>
           <a:prstGeom prst="rect">
             <a:avLst/>
           </a:prstGeom>
           <a:noFill/>
-          <a:ln w="7200">
+        </p:spPr>
+        <p:txBody>
+          <a:bodyPr wrap="square" lIns="0" rIns="0" tIns="0" bIns="0" anchor="t">
+            <a:spAutoFit/>
+          </a:bodyPr>
+          <a:lstStyle/>
+          <a:p>
+            <a:pPr algn="l">
+              <a:lnSpc>
+                <a:spcPts val="754"/>
+              </a:lnSpc>
+            </a:pPr>
+            <a:r>
+              <a:rPr sz="520" b="1" spc="240">
+                <a:solidFill>
+                  <a:srgbClr val="6B7280"/>
+                </a:solidFill>
+                <a:latin typeface="맑은 고딕"/>
+                <a:ea typeface="맑은 고딕"/>
+              </a:rPr>
+              <a:t>시술 안내</a:t>
+            </a:r>
+          </a:p>
+        </p:txBody>
+      </p:sp>
+      <p:sp>
+        <p:nvSpPr>
+          <p:cNvPr id="4" name="Oval 3"/>
+          <p:cNvSpPr/>
+          <p:nvPr/>
+        </p:nvSpPr>
+        <p:spPr>
+          <a:xfrm>
+            <a:off x="367200" y="374400"/>
+            <a:ext cx="57600" cy="57600"/>
+          </a:xfrm>
+          <a:prstGeom prst="ellipse">
+            <a:avLst/>
+          </a:prstGeom>
+          <a:solidFill>
+            <a:srgbClr val="FF6F8E"/>
+          </a:solidFill>
+          <a:ln w="5760">
+            <a:solidFill>
+              <a:srgbClr val="FF6F8E"/>
+            </a:solidFill>
+          </a:ln>
+        </p:spPr>
+        <p:txBody>
+          <a:bodyPr rtlCol="0" anchor="ctr"/>
+          <a:lstStyle/>
+          <a:p>
+            <a:pPr algn="ctr"/>
+          </a:p>
+        </p:txBody>
+      </p:sp>
+      <p:sp>
+        <p:nvSpPr>
+          <p:cNvPr id="5" name="텍스트"/>
+          <p:cNvSpPr txBox="1"/>
+          <p:nvPr/>
+        </p:nvSpPr>
+        <p:spPr>
+          <a:xfrm>
+            <a:off x="540000" y="331200"/>
+            <a:ext cx="1512000" cy="158400"/>
+          </a:xfrm>
+          <a:prstGeom prst="rect">
+            <a:avLst/>
+          </a:prstGeom>
+          <a:noFill/>
+        </p:spPr>
+        <p:txBody>
+          <a:bodyPr wrap="square" lIns="0" rIns="0" tIns="0" bIns="0" anchor="t">
+            <a:spAutoFit/>
+          </a:bodyPr>
+          <a:lstStyle/>
+          <a:p>
+            <a:pPr algn="l">
+              <a:lnSpc>
+                <a:spcPts val="1073"/>
+              </a:lnSpc>
+            </a:pPr>
+            <a:r>
+              <a:rPr sz="740" b="1">
+                <a:solidFill>
+                  <a:srgbClr val="12151C"/>
+                </a:solidFill>
+                <a:latin typeface="맑은 고딕"/>
+                <a:ea typeface="맑은 고딕"/>
+              </a:rPr>
+              <a:t>펌</a:t>
+            </a:r>
+          </a:p>
+        </p:txBody>
+      </p:sp>
+      <p:sp>
+        <p:nvSpPr>
+          <p:cNvPr id="6" name="Oval 5"/>
+          <p:cNvSpPr/>
+          <p:nvPr/>
+        </p:nvSpPr>
+        <p:spPr>
+          <a:xfrm>
+            <a:off x="367200" y="597600"/>
+            <a:ext cx="57600" cy="57600"/>
+          </a:xfrm>
+          <a:prstGeom prst="ellipse">
+            <a:avLst/>
+          </a:prstGeom>
+          <a:solidFill>
+            <a:srgbClr val="F3F4F6"/>
+          </a:solidFill>
+          <a:ln w="5760">
+            <a:solidFill>
+              <a:srgbClr val="FF6F8E"/>
+            </a:solidFill>
+          </a:ln>
+        </p:spPr>
+        <p:txBody>
+          <a:bodyPr rtlCol="0" anchor="ctr"/>
+          <a:lstStyle/>
+          <a:p>
+            <a:pPr algn="ctr"/>
+          </a:p>
+        </p:txBody>
+      </p:sp>
+      <p:sp>
+        <p:nvSpPr>
+          <p:cNvPr id="7" name="텍스트"/>
+          <p:cNvSpPr txBox="1"/>
+          <p:nvPr/>
+        </p:nvSpPr>
+        <p:spPr>
+          <a:xfrm>
+            <a:off x="540000" y="554400"/>
+            <a:ext cx="1512000" cy="158400"/>
+          </a:xfrm>
+          <a:prstGeom prst="rect">
+            <a:avLst/>
+          </a:prstGeom>
+          <a:noFill/>
+        </p:spPr>
+        <p:txBody>
+          <a:bodyPr wrap="square" lIns="0" rIns="0" tIns="0" bIns="0" anchor="t">
+            <a:spAutoFit/>
+          </a:bodyPr>
+          <a:lstStyle/>
+          <a:p>
+            <a:pPr algn="l">
+              <a:lnSpc>
+                <a:spcPts val="1073"/>
+              </a:lnSpc>
+            </a:pPr>
+            <a:r>
+              <a:rPr sz="740" b="1">
+                <a:solidFill>
+                  <a:srgbClr val="12151C"/>
+                </a:solidFill>
+                <a:latin typeface="맑은 고딕"/>
+                <a:ea typeface="맑은 고딕"/>
+              </a:rPr>
+              <a:t>왁싱</a:t>
+            </a:r>
+          </a:p>
+        </p:txBody>
+      </p:sp>
+      <p:sp>
+        <p:nvSpPr>
+          <p:cNvPr id="8" name="Oval 7"/>
+          <p:cNvSpPr/>
+          <p:nvPr/>
+        </p:nvSpPr>
+        <p:spPr>
+          <a:xfrm>
+            <a:off x="367200" y="820800"/>
+            <a:ext cx="57600" cy="57600"/>
+          </a:xfrm>
+          <a:prstGeom prst="ellipse">
+            <a:avLst/>
+          </a:prstGeom>
+          <a:solidFill>
+            <a:srgbClr val="F3F4F6"/>
+          </a:solidFill>
+          <a:ln w="5760">
+            <a:solidFill>
+              <a:srgbClr val="FF6F8E"/>
+            </a:solidFill>
+          </a:ln>
+        </p:spPr>
+        <p:txBody>
+          <a:bodyPr rtlCol="0" anchor="ctr"/>
+          <a:lstStyle/>
+          <a:p>
+            <a:pPr algn="ctr"/>
+          </a:p>
+        </p:txBody>
+      </p:sp>
+      <p:sp>
+        <p:nvSpPr>
+          <p:cNvPr id="9" name="텍스트"/>
+          <p:cNvSpPr txBox="1"/>
+          <p:nvPr/>
+        </p:nvSpPr>
+        <p:spPr>
+          <a:xfrm>
+            <a:off x="540000" y="777600"/>
+            <a:ext cx="1512000" cy="158400"/>
+          </a:xfrm>
+          <a:prstGeom prst="rect">
+            <a:avLst/>
+          </a:prstGeom>
+          <a:noFill/>
+        </p:spPr>
+        <p:txBody>
+          <a:bodyPr wrap="square" lIns="0" rIns="0" tIns="0" bIns="0" anchor="t">
+            <a:spAutoFit/>
+          </a:bodyPr>
+          <a:lstStyle/>
+          <a:p>
+            <a:pPr algn="l">
+              <a:lnSpc>
+                <a:spcPts val="1073"/>
+              </a:lnSpc>
+            </a:pPr>
+            <a:r>
+              <a:rPr sz="740" b="1">
+                <a:solidFill>
+                  <a:srgbClr val="12151C"/>
+                </a:solidFill>
+                <a:latin typeface="맑은 고딕"/>
+                <a:ea typeface="맑은 고딕"/>
+              </a:rPr>
+              <a:t>두피 케어</a:t>
+            </a:r>
+          </a:p>
+        </p:txBody>
+      </p:sp>
+      <p:sp>
+        <p:nvSpPr>
+          <p:cNvPr id="10" name="Oval 9"/>
+          <p:cNvSpPr/>
+          <p:nvPr/>
+        </p:nvSpPr>
+        <p:spPr>
+          <a:xfrm>
+            <a:off x="367200" y="1044000"/>
+            <a:ext cx="57600" cy="57600"/>
+          </a:xfrm>
+          <a:prstGeom prst="ellipse">
+            <a:avLst/>
+          </a:prstGeom>
+          <a:solidFill>
+            <a:srgbClr val="F3F4F6"/>
+          </a:solidFill>
+          <a:ln w="5760">
+            <a:solidFill>
+              <a:srgbClr val="FF6F8E"/>
+            </a:solidFill>
+          </a:ln>
+        </p:spPr>
+        <p:txBody>
+          <a:bodyPr rtlCol="0" anchor="ctr"/>
+          <a:lstStyle/>
+          <a:p>
+            <a:pPr algn="ctr"/>
+          </a:p>
+        </p:txBody>
+      </p:sp>
+      <p:sp>
+        <p:nvSpPr>
+          <p:cNvPr id="11" name="텍스트"/>
+          <p:cNvSpPr txBox="1"/>
+          <p:nvPr/>
+        </p:nvSpPr>
+        <p:spPr>
+          <a:xfrm>
+            <a:off x="540000" y="1000800"/>
+            <a:ext cx="1512000" cy="158400"/>
+          </a:xfrm>
+          <a:prstGeom prst="rect">
+            <a:avLst/>
+          </a:prstGeom>
+          <a:noFill/>
+        </p:spPr>
+        <p:txBody>
+          <a:bodyPr wrap="square" lIns="0" rIns="0" tIns="0" bIns="0" anchor="t">
+            <a:spAutoFit/>
+          </a:bodyPr>
+          <a:lstStyle/>
+          <a:p>
+            <a:pPr algn="l">
+              <a:lnSpc>
+                <a:spcPts val="1073"/>
+              </a:lnSpc>
+            </a:pPr>
+            <a:r>
+              <a:rPr sz="740" b="1">
+                <a:solidFill>
+                  <a:srgbClr val="12151C"/>
+                </a:solidFill>
+                <a:latin typeface="맑은 고딕"/>
+                <a:ea typeface="맑은 고딕"/>
+              </a:rPr>
+              <a:t>남성 컷</a:t>
+            </a:r>
+          </a:p>
+        </p:txBody>
+      </p:sp>
+      <p:cxnSp>
+        <p:nvCxnSpPr>
+          <p:cNvPr id="12" name="Connector 11"/>
+          <p:cNvCxnSpPr/>
+          <p:nvPr/>
+        </p:nvCxnSpPr>
+        <p:spPr>
+          <a:xfrm>
+            <a:off x="2232000" y="345600"/>
+            <a:ext cx="0" cy="1166400"/>
+          </a:xfrm>
+          <a:prstGeom prst="line">
+            <a:avLst/>
+          </a:prstGeom>
+          <a:ln w="3600">
+            <a:solidFill>
+              <a:srgbClr val="DCDFE4"/>
+            </a:solidFill>
+          </a:ln>
+        </p:spPr>
+      </p:cxnSp>
+      <p:sp>
+        <p:nvSpPr>
+          <p:cNvPr id="13" name="텍스트"/>
+          <p:cNvSpPr txBox="1"/>
+          <p:nvPr/>
+        </p:nvSpPr>
+        <p:spPr>
+          <a:xfrm>
+            <a:off x="2376000" y="396000"/>
+            <a:ext cx="648000" cy="91441"/>
+          </a:xfrm>
+          <a:prstGeom prst="rect">
+            <a:avLst/>
+          </a:prstGeom>
+          <a:noFill/>
+        </p:spPr>
+        <p:txBody>
+          <a:bodyPr wrap="square" lIns="0" rIns="0" tIns="0" bIns="0" anchor="t">
+            <a:spAutoFit/>
+          </a:bodyPr>
+          <a:lstStyle/>
+          <a:p>
+            <a:pPr algn="l">
+              <a:lnSpc>
+                <a:spcPts val="696"/>
+              </a:lnSpc>
+            </a:pPr>
+            <a:r>
+              <a:rPr sz="480" b="1" spc="140">
+                <a:solidFill>
+                  <a:srgbClr val="6B7280"/>
+                </a:solidFill>
+                <a:latin typeface="맑은 고딕"/>
+                <a:ea typeface="맑은 고딕"/>
+              </a:rPr>
+              <a:t>HOURS</a:t>
+            </a:r>
+          </a:p>
+        </p:txBody>
+      </p:sp>
+      <p:sp>
+        <p:nvSpPr>
+          <p:cNvPr id="14" name="텍스트"/>
+          <p:cNvSpPr txBox="1"/>
+          <p:nvPr/>
+        </p:nvSpPr>
+        <p:spPr>
+          <a:xfrm>
+            <a:off x="2376000" y="511200"/>
+            <a:ext cx="720000" cy="118111"/>
+          </a:xfrm>
+          <a:prstGeom prst="rect">
+            <a:avLst/>
+          </a:prstGeom>
+          <a:noFill/>
+        </p:spPr>
+        <p:txBody>
+          <a:bodyPr wrap="square" lIns="0" rIns="0" tIns="0" bIns="0" anchor="t">
+            <a:spAutoFit/>
+          </a:bodyPr>
+          <a:lstStyle/>
+          <a:p>
+            <a:pPr algn="l">
+              <a:lnSpc>
+                <a:spcPts val="899"/>
+              </a:lnSpc>
+            </a:pPr>
+            <a:r>
+              <a:rPr sz="620" b="0">
+                <a:solidFill>
+                  <a:srgbClr val="12151C"/>
+                </a:solidFill>
+                <a:latin typeface="맑은 고딕"/>
+                <a:ea typeface="맑은 고딕"/>
+              </a:rPr>
+              <a:t>평일 10:00 – 21:00</a:t>
+            </a:r>
+          </a:p>
+        </p:txBody>
+      </p:sp>
+      <p:sp>
+        <p:nvSpPr>
+          <p:cNvPr id="15" name="텍스트"/>
+          <p:cNvSpPr txBox="1"/>
+          <p:nvPr/>
+        </p:nvSpPr>
+        <p:spPr>
+          <a:xfrm>
+            <a:off x="2376000" y="835200"/>
+            <a:ext cx="648000" cy="91441"/>
+          </a:xfrm>
+          <a:prstGeom prst="rect">
+            <a:avLst/>
+          </a:prstGeom>
+          <a:noFill/>
+        </p:spPr>
+        <p:txBody>
+          <a:bodyPr wrap="square" lIns="0" rIns="0" tIns="0" bIns="0" anchor="t">
+            <a:spAutoFit/>
+          </a:bodyPr>
+          <a:lstStyle/>
+          <a:p>
+            <a:pPr algn="l">
+              <a:lnSpc>
+                <a:spcPts val="696"/>
+              </a:lnSpc>
+            </a:pPr>
+            <a:r>
+              <a:rPr sz="480" b="1" spc="140">
+                <a:solidFill>
+                  <a:srgbClr val="6B7280"/>
+                </a:solidFill>
+                <a:latin typeface="맑은 고딕"/>
+                <a:ea typeface="맑은 고딕"/>
+              </a:rPr>
+              <a:t>BLOG</a:t>
+            </a:r>
+          </a:p>
+        </p:txBody>
+      </p:sp>
+      <p:sp>
+        <p:nvSpPr>
+          <p:cNvPr id="16" name="텍스트"/>
+          <p:cNvSpPr txBox="1"/>
+          <p:nvPr/>
+        </p:nvSpPr>
+        <p:spPr>
+          <a:xfrm>
+            <a:off x="2376000" y="950400"/>
+            <a:ext cx="684000" cy="118111"/>
+          </a:xfrm>
+          <a:prstGeom prst="rect">
+            <a:avLst/>
+          </a:prstGeom>
+          <a:noFill/>
+        </p:spPr>
+        <p:txBody>
+          <a:bodyPr wrap="square" lIns="0" rIns="0" tIns="0" bIns="0" anchor="t">
+            <a:spAutoFit/>
+          </a:bodyPr>
+          <a:lstStyle/>
+          <a:p>
+            <a:pPr algn="l">
+              <a:lnSpc>
+                <a:spcPts val="899"/>
+              </a:lnSpc>
+            </a:pPr>
+            <a:r>
+              <a:rPr sz="620" b="0">
+                <a:solidFill>
+                  <a:srgbClr val="12151C"/>
+                </a:solidFill>
+                <a:latin typeface="맑은 고딕"/>
+                <a:ea typeface="맑은 고딕"/>
+              </a:rPr>
+              <a:t>blog.example.com</a:t>
+            </a:r>
+          </a:p>
+        </p:txBody>
+      </p:sp>
+      <p:sp>
+        <p:nvSpPr>
+          <p:cNvPr id="17" name="Rectangle 16"/>
+          <p:cNvSpPr/>
+          <p:nvPr/>
+        </p:nvSpPr>
+        <p:spPr>
+          <a:xfrm>
+            <a:off x="2376000" y="1224000"/>
+            <a:ext cx="237600" cy="237600"/>
+          </a:xfrm>
+          <a:prstGeom prst="rect">
+            <a:avLst/>
+          </a:prstGeom>
+          <a:noFill/>
+          <a:ln w="4320">
             <a:solidFill>
               <a:srgbClr val="6B7280"/>
             </a:solidFill>
@@ -3424,14 +4076,14 @@
       </p:sp>
       <p:sp>
         <p:nvSpPr>
-          <p:cNvPr id="3" name="텍스트"/>
+          <p:cNvPr id="18" name="텍스트"/>
           <p:cNvSpPr txBox="1"/>
           <p:nvPr/>
         </p:nvSpPr>
         <p:spPr>
           <a:xfrm>
-            <a:off x="2304000" y="504000"/>
-            <a:ext cx="684000" cy="684000"/>
+            <a:off x="2376000" y="1224000"/>
+            <a:ext cx="237600" cy="237600"/>
           </a:xfrm>
           <a:prstGeom prst="rect">
             <a:avLst/>
@@ -3446,11 +4098,11 @@
           <a:p>
             <a:pPr algn="ctr">
               <a:lnSpc>
-                <a:spcPts val="1595"/>
+                <a:spcPts val="725"/>
               </a:lnSpc>
             </a:pPr>
             <a:r>
-              <a:rPr sz="1100" b="1">
+              <a:rPr sz="500" b="1">
                 <a:solidFill>
                   <a:srgbClr val="6B7280"/>
                 </a:solidFill>
@@ -3458,115 +4110,6 @@
                 <a:ea typeface="맑은 고딕"/>
               </a:rPr>
               <a:t>QR</a:t>
-            </a:r>
-          </a:p>
-        </p:txBody>
-      </p:sp>
-      <p:sp>
-        <p:nvSpPr>
-          <p:cNvPr id="4" name="텍스트"/>
-          <p:cNvSpPr txBox="1"/>
-          <p:nvPr/>
-        </p:nvSpPr>
-        <p:spPr>
-          <a:xfrm>
-            <a:off x="252000" y="504000"/>
-            <a:ext cx="1728000" cy="720000"/>
-          </a:xfrm>
-          <a:prstGeom prst="rect">
-            <a:avLst/>
-          </a:prstGeom>
-          <a:noFill/>
-        </p:spPr>
-        <p:txBody>
-          <a:bodyPr wrap="square" lIns="0" rIns="0" tIns="0" bIns="0" anchor="t">
-            <a:spAutoFit/>
-          </a:bodyPr>
-          <a:lstStyle/>
-          <a:p>
-            <a:pPr algn="l">
-              <a:lnSpc>
-                <a:spcPts val="1739"/>
-              </a:lnSpc>
-            </a:pPr>
-            <a:r>
-              <a:rPr sz="1200" b="1">
-                <a:solidFill>
-                  <a:srgbClr val="12151C"/>
-                </a:solidFill>
-                <a:latin typeface="맑은 고딕"/>
-                <a:ea typeface="맑은 고딕"/>
-              </a:rPr>
-              <a:t>당신의 하루를 환하게</a:t>
-            </a:r>
-          </a:p>
-        </p:txBody>
-      </p:sp>
-      <p:sp>
-        <p:nvSpPr>
-          <p:cNvPr id="5" name="Rectangle 4"/>
-          <p:cNvSpPr/>
-          <p:nvPr/>
-        </p:nvSpPr>
-        <p:spPr>
-          <a:xfrm>
-            <a:off x="252000" y="1296000"/>
-            <a:ext cx="144000" cy="18000"/>
-          </a:xfrm>
-          <a:prstGeom prst="rect">
-            <a:avLst/>
-          </a:prstGeom>
-          <a:solidFill>
-            <a:srgbClr val="FF6F8E"/>
-          </a:solidFill>
-          <a:ln>
-            <a:noFill/>
-          </a:ln>
-        </p:spPr>
-        <p:txBody>
-          <a:bodyPr rtlCol="0" anchor="ctr"/>
-          <a:lstStyle/>
-          <a:p>
-            <a:pPr algn="ctr"/>
-          </a:p>
-        </p:txBody>
-      </p:sp>
-      <p:sp>
-        <p:nvSpPr>
-          <p:cNvPr id="6" name="텍스트"/>
-          <p:cNvSpPr txBox="1"/>
-          <p:nvPr/>
-        </p:nvSpPr>
-        <p:spPr>
-          <a:xfrm>
-            <a:off x="252000" y="1404000"/>
-            <a:ext cx="1656000" cy="133351"/>
-          </a:xfrm>
-          <a:prstGeom prst="rect">
-            <a:avLst/>
-          </a:prstGeom>
-          <a:noFill/>
-        </p:spPr>
-        <p:txBody>
-          <a:bodyPr wrap="square" lIns="0" rIns="0" tIns="0" bIns="0" anchor="t">
-            <a:spAutoFit/>
-          </a:bodyPr>
-          <a:lstStyle/>
-          <a:p>
-            <a:pPr algn="l">
-              <a:lnSpc>
-                <a:spcPts val="1015"/>
-              </a:lnSpc>
-            </a:pPr>
-            <a:r>
-              <a:rPr sz="700" b="1" spc="200">
-                <a:solidFill>
-                  <a:srgbClr val="6B7280"/>
-                </a:solidFill>
-                <a:latin typeface="맑은 고딕"/>
-                <a:ea typeface="맑은 고딕"/>
-              </a:rPr>
-              <a:t>샵 이름</a:t>
             </a:r>
           </a:p>
         </p:txBody>
